--- a/APLOS/POPResources/Templates/QRIDP6Hindi.pptx
+++ b/APLOS/POPResources/Templates/QRIDP6Hindi.pptx
@@ -214,7 +214,7 @@
           <a:p>
             <a:fld id="{7B7E7892-5A32-4575-94C1-DE4A6525AA41}" type="datetimeFigureOut">
               <a:rPr lang="en-US" smtClean="0"/>
-              <a:t>9/8/2021</a:t>
+              <a:t>9/29/2021</a:t>
             </a:fld>
             <a:endParaRPr lang="en-US"/>
           </a:p>
@@ -392,7 +392,7 @@
           <a:p>
             <a:fld id="{2CB70909-C19F-4098-BABE-826759D4F724}" type="datetimeFigureOut">
               <a:rPr lang="en-US" smtClean="0"/>
-              <a:t>9/8/2021</a:t>
+              <a:t>9/29/2021</a:t>
             </a:fld>
             <a:endParaRPr lang="en-US"/>
           </a:p>
@@ -802,7 +802,7 @@
           <a:p>
             <a:fld id="{6595CB52-7A80-4EDE-BD89-15F3D80D2847}" type="datetime1">
               <a:rPr lang="en-US" smtClean="0"/>
-              <a:t>9/8/2021</a:t>
+              <a:t>9/29/2021</a:t>
             </a:fld>
             <a:endParaRPr lang="en-US" dirty="0"/>
           </a:p>
@@ -989,7 +989,7 @@
           <a:p>
             <a:fld id="{FCBAD589-A814-48D4-A41D-AEEBA8B062ED}" type="datetime1">
               <a:rPr lang="en-US" smtClean="0"/>
-              <a:t>9/8/2021</a:t>
+              <a:t>9/29/2021</a:t>
             </a:fld>
             <a:endParaRPr lang="en-US" dirty="0"/>
           </a:p>
@@ -1184,7 +1184,7 @@
           <a:p>
             <a:fld id="{9EE1E399-81D8-4F32-A773-79DD86C9D815}" type="datetime1">
               <a:rPr lang="en-US" smtClean="0"/>
-              <a:t>9/8/2021</a:t>
+              <a:t>9/29/2021</a:t>
             </a:fld>
             <a:endParaRPr lang="en-US" dirty="0"/>
           </a:p>
@@ -1371,7 +1371,7 @@
           <a:p>
             <a:fld id="{798256AB-61F5-4AE9-B2A9-B219460FA3D9}" type="datetime1">
               <a:rPr lang="en-US" smtClean="0"/>
-              <a:t>9/8/2021</a:t>
+              <a:t>9/29/2021</a:t>
             </a:fld>
             <a:endParaRPr lang="en-US" dirty="0"/>
           </a:p>
@@ -1633,7 +1633,7 @@
           <a:p>
             <a:fld id="{9232F403-2438-4303-9714-E49C6D0B1E28}" type="datetime1">
               <a:rPr lang="en-US" smtClean="0"/>
-              <a:t>9/8/2021</a:t>
+              <a:t>9/29/2021</a:t>
             </a:fld>
             <a:endParaRPr lang="en-US" dirty="0"/>
           </a:p>
@@ -1883,7 +1883,7 @@
           <a:p>
             <a:fld id="{5F4B6725-C72E-4A01-97E1-5898CAC1CF6F}" type="datetime1">
               <a:rPr lang="en-US" smtClean="0"/>
-              <a:t>9/8/2021</a:t>
+              <a:t>9/29/2021</a:t>
             </a:fld>
             <a:endParaRPr lang="en-US" dirty="0"/>
           </a:p>
@@ -2273,7 +2273,7 @@
           <a:p>
             <a:fld id="{2C272315-A371-4329-8393-D21113A0CC5B}" type="datetime1">
               <a:rPr lang="en-US" smtClean="0"/>
-              <a:t>9/8/2021</a:t>
+              <a:t>9/29/2021</a:t>
             </a:fld>
             <a:endParaRPr lang="en-US" dirty="0"/>
           </a:p>
@@ -2405,7 +2405,7 @@
           <a:p>
             <a:fld id="{E3501887-07F5-4895-9E1A-2035534BDEE9}" type="datetime1">
               <a:rPr lang="en-US" smtClean="0"/>
-              <a:t>9/8/2021</a:t>
+              <a:t>9/29/2021</a:t>
             </a:fld>
             <a:endParaRPr lang="en-US" dirty="0"/>
           </a:p>
@@ -2510,7 +2510,7 @@
           <a:p>
             <a:fld id="{F2A78092-FC37-4448-AF31-357D713EC2CE}" type="datetime1">
               <a:rPr lang="en-US" smtClean="0"/>
-              <a:t>9/8/2021</a:t>
+              <a:t>9/29/2021</a:t>
             </a:fld>
             <a:endParaRPr lang="en-US" dirty="0"/>
           </a:p>
@@ -2805,7 +2805,7 @@
           <a:p>
             <a:fld id="{68303B59-8064-4F92-9589-6397FBC99231}" type="datetime1">
               <a:rPr lang="en-US" smtClean="0"/>
-              <a:t>9/8/2021</a:t>
+              <a:t>9/29/2021</a:t>
             </a:fld>
             <a:endParaRPr lang="en-US" dirty="0"/>
           </a:p>
@@ -3078,7 +3078,7 @@
           <a:p>
             <a:fld id="{918ADC9D-7416-45ED-BDA5-6017A57A36C0}" type="datetime1">
               <a:rPr lang="en-US" smtClean="0"/>
-              <a:t>9/8/2021</a:t>
+              <a:t>9/29/2021</a:t>
             </a:fld>
             <a:endParaRPr lang="en-US" dirty="0"/>
           </a:p>
@@ -3308,7 +3308,7 @@
           <a:p>
             <a:fld id="{F0E8A625-E03B-4A49-8E37-41B5871683EF}" type="datetime1">
               <a:rPr lang="en-US" smtClean="0"/>
-              <a:t>9/8/2021</a:t>
+              <a:t>9/29/2021</a:t>
             </a:fld>
             <a:endParaRPr lang="en-US" dirty="0"/>
           </a:p>
@@ -5785,7 +5785,7 @@
         </p:nvSpPr>
         <p:spPr>
           <a:xfrm>
-            <a:off x="917728" y="2042894"/>
+            <a:off x="891604" y="2042894"/>
             <a:ext cx="992560" cy="156887"/>
           </a:xfrm>
           <a:prstGeom prst="rect">
@@ -5919,7 +5919,7 @@
                 <a:latin typeface="Arial Narrow" panose="020B0606020202030204" pitchFamily="34" charset="0"/>
                 <a:cs typeface="Arial" panose="020B0604020202020204" pitchFamily="34" charset="0"/>
               </a:rPr>
-              <a:t>EmergencyTelNo</a:t>
+              <a:t>PhoneNumber</a:t>
             </a:r>
             <a:r>
               <a:rPr lang="en-US" sz="800" dirty="0">
